--- a/m4/diapositivos/sessao-08-m4-f20.pptx
+++ b/m4/diapositivos/sessao-08-m4-f20.pptx
@@ -1873,9 +1873,6 @@
               <a:lnSpc>
                 <a:spcPct val="120000"/>
               </a:lnSpc>
-              <a:spcAft>
-                <a:spcPts val="1000"/>
-              </a:spcAft>
               <a:buNone/>
             </a:pPr>
             <a:r>
@@ -1887,22 +1884,16 @@
                 <a:ea typeface="Georgia" pitchFamily="34" charset="-122"/>
                 <a:cs typeface="Georgia" pitchFamily="34" charset="-120"/>
               </a:rPr>
-              <a:t>Data, local, companhia e peça: o docente indica-as; escreve-as no caderno.</a:t>
-            </a:r>
-            <a:endParaRPr lang="en-US" sz="2300" dirty="0"/>
-          </a:p>
-          <a:p>
+              <a:t>Data, local, companhia e peça: o docente indica-as; escreve-as no caderno. Durante o espetáculo </a:t>
+            </a:r>
             <a:pPr indent="0" marL="0">
               <a:lnSpc>
                 <a:spcPct val="120000"/>
               </a:lnSpc>
-              <a:spcAft>
-                <a:spcPts val="1000"/>
-              </a:spcAft>
-              <a:buNone/>
-            </a:pPr>
-            <a:r>
-              <a:rPr lang="en-US" sz="2300" dirty="0">
+              <a:buNone/>
+            </a:pPr>
+            <a:r>
+              <a:rPr lang="en-US" sz="2300" b="1" dirty="0">
                 <a:solidFill>
                   <a:srgbClr val="F2F0EA"/>
                 </a:solidFill>
@@ -1910,7 +1901,126 @@
                 <a:ea typeface="Georgia" pitchFamily="34" charset="-122"/>
                 <a:cs typeface="Georgia" pitchFamily="34" charset="-120"/>
               </a:rPr>
-              <a:t>Durante o espetáculo não se usa telemóvel: leva o caderno e um lápis e escreve só no intervalo ou no fim. Escolhe já uma personagem e uma cena para observar com atenção. Se a peça for Frei Luís de Sousa, relê antes a cena do incêndio (ato I) e lê a do Romeiro (ato II); se for outra, lê a sinopse e o nome do encenador na folha de sala ou na página do teatro.</a:t>
+              <a:t>não se usa telemóvel</a:t>
+            </a:r>
+            <a:pPr indent="0" marL="0">
+              <a:lnSpc>
+                <a:spcPct val="120000"/>
+              </a:lnSpc>
+              <a:buNone/>
+            </a:pPr>
+            <a:r>
+              <a:rPr lang="en-US" sz="2300" dirty="0">
+                <a:solidFill>
+                  <a:srgbClr val="F2F0EA"/>
+                </a:solidFill>
+                <a:latin typeface="Georgia" pitchFamily="34" charset="0"/>
+                <a:ea typeface="Georgia" pitchFamily="34" charset="-122"/>
+                <a:cs typeface="Georgia" pitchFamily="34" charset="-120"/>
+              </a:rPr>
+              <a:t>: leva o caderno e um lápis e escreve só no intervalo ou no fim. Escolhe já </a:t>
+            </a:r>
+            <a:pPr indent="0" marL="0">
+              <a:lnSpc>
+                <a:spcPct val="120000"/>
+              </a:lnSpc>
+              <a:buNone/>
+            </a:pPr>
+            <a:r>
+              <a:rPr lang="en-US" sz="2300" b="1" dirty="0">
+                <a:solidFill>
+                  <a:srgbClr val="F2F0EA"/>
+                </a:solidFill>
+                <a:latin typeface="Georgia" pitchFamily="34" charset="0"/>
+                <a:ea typeface="Georgia" pitchFamily="34" charset="-122"/>
+                <a:cs typeface="Georgia" pitchFamily="34" charset="-120"/>
+              </a:rPr>
+              <a:t>uma personagem</a:t>
+            </a:r>
+            <a:pPr indent="0" marL="0">
+              <a:lnSpc>
+                <a:spcPct val="120000"/>
+              </a:lnSpc>
+              <a:buNone/>
+            </a:pPr>
+            <a:r>
+              <a:rPr lang="en-US" sz="2300" dirty="0">
+                <a:solidFill>
+                  <a:srgbClr val="F2F0EA"/>
+                </a:solidFill>
+                <a:latin typeface="Georgia" pitchFamily="34" charset="0"/>
+                <a:ea typeface="Georgia" pitchFamily="34" charset="-122"/>
+                <a:cs typeface="Georgia" pitchFamily="34" charset="-120"/>
+              </a:rPr>
+              <a:t> e </a:t>
+            </a:r>
+            <a:pPr indent="0" marL="0">
+              <a:lnSpc>
+                <a:spcPct val="120000"/>
+              </a:lnSpc>
+              <a:buNone/>
+            </a:pPr>
+            <a:r>
+              <a:rPr lang="en-US" sz="2300" b="1" dirty="0">
+                <a:solidFill>
+                  <a:srgbClr val="F2F0EA"/>
+                </a:solidFill>
+                <a:latin typeface="Georgia" pitchFamily="34" charset="0"/>
+                <a:ea typeface="Georgia" pitchFamily="34" charset="-122"/>
+                <a:cs typeface="Georgia" pitchFamily="34" charset="-120"/>
+              </a:rPr>
+              <a:t>uma cena</a:t>
+            </a:r>
+            <a:pPr indent="0" marL="0">
+              <a:lnSpc>
+                <a:spcPct val="120000"/>
+              </a:lnSpc>
+              <a:buNone/>
+            </a:pPr>
+            <a:r>
+              <a:rPr lang="en-US" sz="2300" dirty="0">
+                <a:solidFill>
+                  <a:srgbClr val="F2F0EA"/>
+                </a:solidFill>
+                <a:latin typeface="Georgia" pitchFamily="34" charset="0"/>
+                <a:ea typeface="Georgia" pitchFamily="34" charset="-122"/>
+                <a:cs typeface="Georgia" pitchFamily="34" charset="-120"/>
+              </a:rPr>
+              <a:t> para observar com atenção. Se a peça for </a:t>
+            </a:r>
+            <a:pPr indent="0" marL="0">
+              <a:lnSpc>
+                <a:spcPct val="120000"/>
+              </a:lnSpc>
+              <a:buNone/>
+            </a:pPr>
+            <a:r>
+              <a:rPr lang="en-US" sz="2300" i="1" dirty="0">
+                <a:solidFill>
+                  <a:srgbClr val="F2F0EA"/>
+                </a:solidFill>
+                <a:latin typeface="Georgia" pitchFamily="34" charset="0"/>
+                <a:ea typeface="Georgia" pitchFamily="34" charset="-122"/>
+                <a:cs typeface="Georgia" pitchFamily="34" charset="-120"/>
+              </a:rPr>
+              <a:t>Frei Luís de Sousa</a:t>
+            </a:r>
+            <a:pPr indent="0" marL="0">
+              <a:lnSpc>
+                <a:spcPct val="120000"/>
+              </a:lnSpc>
+              <a:buNone/>
+            </a:pPr>
+            <a:r>
+              <a:rPr lang="en-US" sz="2300" dirty="0">
+                <a:solidFill>
+                  <a:srgbClr val="F2F0EA"/>
+                </a:solidFill>
+                <a:latin typeface="Georgia" pitchFamily="34" charset="0"/>
+                <a:ea typeface="Georgia" pitchFamily="34" charset="-122"/>
+                <a:cs typeface="Georgia" pitchFamily="34" charset="-120"/>
+              </a:rPr>
+              <a:t>, relê antes a cena do incêndio (ato I) e lê a do Romeiro (ato II); se for outra, lê a sinopse e o nome do encenador na folha de sala ou na página do teatro.</a:t>
             </a:r>
             <a:endParaRPr lang="en-US" sz="2300" dirty="0"/>
           </a:p>
